--- a/slides-en/01-overview-of-communication.pptx
+++ b/slides-en/01-overview-of-communication.pptx
@@ -519,27 +519,27 @@
           <a:lstStyle/>
           <a:p>
             <a:r>
-              <a:t>MỞ ĐẦU BUỔI HỌC (2 phút)</a:t>
-            </a:r>
-          </a:p>
-          <a:p>
-            <a:r>
-              <a:t>• Chào lớp, giới thiệu bản thân ngắn gọn.</a:t>
-            </a:r>
-          </a:p>
-          <a:p>
-            <a:r>
-              <a:t>• Hỏi mở: "Theo các bạn, một ngày chúng ta dành bao nhiêu phần trăm thời gian làm việc để giao tiếp?" (Đáp án tham khảo: 70–80%).</a:t>
-            </a:r>
-          </a:p>
-          <a:p>
-            <a:r>
-              <a:t>• Chốt: học phần này dạy hai nhóm kỹ năng — NÓI và VIẾT — đều là công cụ kiếm sống.</a:t>
-            </a:r>
-          </a:p>
-          <a:p>
-            <a:r>
-              <a:t>CHUYỂN Ý: "Trước khi luyện kỹ năng, ta phải hiểu đúng bản chất giao tiếp đã."''</a:t>
+              <a:t>OPENING THE SESSION (2 minutes)</a:t>
+            </a:r>
+          </a:p>
+          <a:p>
+            <a:r>
+              <a:t>• Greet the class, introduce yourself briefly.</a:t>
+            </a:r>
+          </a:p>
+          <a:p>
+            <a:r>
+              <a:t>• Open question: "What percentage of a working day do you think we spend communicating?" (For reference: 70–80%.)</a:t>
+            </a:r>
+          </a:p>
+          <a:p>
+            <a:r>
+              <a:t>• Land it: this course teaches two families of skill — SPEAKING and WRITING — and both are how you will earn a living.</a:t>
+            </a:r>
+          </a:p>
+          <a:p>
+            <a:r>
+              <a:t>BRIDGE: "Before we drill technique, we have to understand what communication actually is."''</a:t>
             </a:r>
           </a:p>
         </p:txBody>
@@ -625,48 +625,48 @@
           <a:lstStyle/>
           <a:p>
             <a:r>
-              <a:t>HÌNH THỨC GIAO TIẾP (2 phút)</a:t>
-            </a:r>
-          </a:p>
-          <a:p>
-            <a:r>
-              <a:t>• 4 cặp phân loại — đi nhanh, đừng sa đà.</a:t>
-            </a:r>
-          </a:p>
-          <a:p>
-            <a:r>
-              <a:t>• Nhấn cặp cuối: TRUYỀN THỐNG ↔ GIAO TIẾP SỐ. Hỏi lớp: "Một email công việc gửi lúc 11 giờ đêm nói lên điều gì về người gửi?"</a:t>
-            </a:r>
-          </a:p>
-          <a:p>
-            <a:r>
-              <a:t>• Nhắc: giao tiếp số vẫn phải giữ đúng chuẩn mực như gặp mặt.</a:t>
+              <a:t>FORMS OF COMMUNICATION (2 minutes)</a:t>
+            </a:r>
+          </a:p>
+          <a:p>
+            <a:r>
+              <a:t>• Four contrasting pairs — go quickly, don't dwell.</a:t>
+            </a:r>
+          </a:p>
+          <a:p>
+            <a:r>
+              <a:t>• Press the last pair: TRADITIONAL ↔ DIGITAL. Ask the class: "What does a work email sent at 11 at night say about the sender?"</a:t>
+            </a:r>
+          </a:p>
+          <a:p>
+            <a:r>
+              <a:t>• Remind them: digital communication is held to the same standards as meeting in person.</a:t>
             </a:r>
           </a:p>
           <a:p/>
           <a:p>
             <a:r>
-              <a:t>NÓI ĐỦ Ý (phần đã rút khỏi slide)</a:t>
-            </a:r>
-          </a:p>
-          <a:p>
-            <a:r>
-              <a:t>• Trực tiếp: giàu thông tin, phản hồi ngay. Gián tiếp (điện thoại, văn bản, email): vượt khoảng cách, có bằng chứng — nhưng dễ hiểu nhầm.</a:t>
-            </a:r>
-          </a:p>
-          <a:p>
-            <a:r>
-              <a:t>• Chính thức: họp, văn bản, hội nghị theo quy định. Không chính thức: trò chuyện ngoài lề, tin đồn — người quản lý giỏi dùng cả hai.</a:t>
-            </a:r>
-          </a:p>
-          <a:p>
-            <a:r>
-              <a:t>• Cá nhân 1–1: sâu, riêng tư. Nhóm: cần điều phối. Đám đông: cần kỹ năng thuyết trình, học ở Chương 2.</a:t>
-            </a:r>
-          </a:p>
-          <a:p>
-            <a:r>
-              <a:t>• Giao tiếp số: email, họp trực tuyến, mạng xã hội, tin nhắn nhóm — chuẩn mực mới là trả lời đúng hạn, đúng kênh, giữ hình ảnh số chuyên nghiệp.</a:t>
+              <a:t>THE FULL VERSION (moved off the slide)</a:t>
+            </a:r>
+          </a:p>
+          <a:p>
+            <a:r>
+              <a:t>• Face to face: rich, immediate feedback. At a distance (phone, documents, email): crosses distance, leaves evidence — but is easily misread.</a:t>
+            </a:r>
+          </a:p>
+          <a:p>
+            <a:r>
+              <a:t>• Formal: meetings, documents, conferences under the rules. Informal: talk on the side, rumour — a good manager uses both.</a:t>
+            </a:r>
+          </a:p>
+          <a:p>
+            <a:r>
+              <a:t>• One to one: deep and private. Group: needs chairing. Audience: needs presentation skill, taught in Chapter 2.</a:t>
+            </a:r>
+          </a:p>
+          <a:p>
+            <a:r>
+              <a:t>• Digital: email, online meetings, social media, group chats — the new norms are replying on time, on the right channel, and keeping a professional digital presence.</a:t>
             </a:r>
           </a:p>
         </p:txBody>
@@ -840,58 +840,58 @@
           <a:lstStyle/>
           <a:p>
             <a:r>
-              <a:t>NĂM NGUYÊN TẮC (3 phút)</a:t>
-            </a:r>
-          </a:p>
-          <a:p>
-            <a:r>
-              <a:t>• Đây là phần SINH VIÊN PHẢI THUỘC — sẽ dùng lại ở tình huống ngay sau đây.</a:t>
-            </a:r>
-          </a:p>
-          <a:p>
-            <a:r>
-              <a:t>• Nguyên tắc TÔN TRỌNG: nói rõ tôn trọng thể hiện qua hành vi cụ thể — đúng giờ, không cắt lời, nhớ tên người đối diện.</a:t>
-            </a:r>
-          </a:p>
-          <a:p>
-            <a:r>
-              <a:t>• Nguyên tắc GIỮ CHỮ TÍN: nhấn mạnh "chữ tín là tài sản kinh doanh" — mất khách vì thất hứa một lần.</a:t>
-            </a:r>
-          </a:p>
-          <a:p>
-            <a:r>
-              <a:t>CHUYỂN Ý: "Bây giờ ta thử áp dụng cả chương vào một tình huống."''</a:t>
+              <a:t>THE FIVE PRINCIPLES (3 minutes)</a:t>
+            </a:r>
+          </a:p>
+          <a:p>
+            <a:r>
+              <a:t>• This is the part STUDENTS MUST KNOW BY HEART — it is used again in the case that follows immediately.</a:t>
+            </a:r>
+          </a:p>
+          <a:p>
+            <a:r>
+              <a:t>• RESPECT: say plainly that respect shows in concrete behaviour — being on time, not interrupting, remembering the other person's name.</a:t>
+            </a:r>
+          </a:p>
+          <a:p>
+            <a:r>
+              <a:t>• KEEPING YOUR WORD: press "your word is a business asset" — one broken promise loses a customer.</a:t>
+            </a:r>
+          </a:p>
+          <a:p>
+            <a:r>
+              <a:t>BRIDGE: "Now let's try applying the whole chapter to one situation."''</a:t>
             </a:r>
           </a:p>
           <a:p/>
           <a:p>
             <a:r>
-              <a:t>NÓI ĐỦ Ý (phần đã rút khỏi slide)</a:t>
-            </a:r>
-          </a:p>
-          <a:p>
-            <a:r>
-              <a:t>• Tôn trọng nhân cách, thời gian, lợi ích và sự khác biệt của đối tượng.</a:t>
-            </a:r>
-          </a:p>
-          <a:p>
-            <a:r>
-              <a:t>• Thiện chí và hợp tác: hướng tới hai bên cùng có lợi — thắng một cuộc cãi có thể thua một khách hàng.</a:t>
-            </a:r>
-          </a:p>
-          <a:p>
-            <a:r>
-              <a:t>• Lắng nghe và thấu hiểu trước: hiểu đúng nhu cầu đối phương rồi mới trình bày quan điểm mình.</a:t>
-            </a:r>
-          </a:p>
-          <a:p>
-            <a:r>
-              <a:t>• Phù hợp ngữ cảnh: đúng vai, đúng lúc, đúng nơi, đúng kênh, đúng mức độ trang trọng.</a:t>
-            </a:r>
-          </a:p>
-          <a:p>
-            <a:r>
-              <a:t>• Chuẩn mực và giữ chữ tín: lời nói và văn bản nhất quán; đã hứa là làm — chữ tín là tài sản kinh doanh.</a:t>
+              <a:t>THE FULL VERSION (moved off the slide)</a:t>
+            </a:r>
+          </a:p>
+          <a:p>
+            <a:r>
+              <a:t>• Respect the person, their time, their interests and their differences.</a:t>
+            </a:r>
+          </a:p>
+          <a:p>
+            <a:r>
+              <a:t>• Goodwill and cooperation: aim at both sides gaining — win the argument and you may lose the customer.</a:t>
+            </a:r>
+          </a:p>
+          <a:p>
+            <a:r>
+              <a:t>• Listen and understand first: get their need right before you set out your own position.</a:t>
+            </a:r>
+          </a:p>
+          <a:p>
+            <a:r>
+              <a:t>• Fit the context: right role, right moment, right place, right channel, right degree of formality.</a:t>
+            </a:r>
+          </a:p>
+          <a:p>
+            <a:r>
+              <a:t>• Standards and keeping your word: speech and documents consistent; a promise made is a promise kept — your word is a business asset.</a:t>
             </a:r>
           </a:p>
         </p:txBody>
@@ -977,32 +977,32 @@
           <a:lstStyle/>
           <a:p>
             <a:r>
-              <a:t>HOẠT ĐỘNG NHÓM (15 phút)</a:t>
-            </a:r>
-          </a:p>
-          <a:p>
-            <a:r>
-              <a:t>• Chia nhóm 4–5 bạn, phát giấy A3 hoặc dùng vở.</a:t>
-            </a:r>
-          </a:p>
-          <a:p>
-            <a:r>
-              <a:t>• Bấm giờ 10 phút thảo luận, 5 phút cho 2 nhóm trình bày.</a:t>
-            </a:r>
-          </a:p>
-          <a:p>
-            <a:r>
-              <a:t>• GỢI Ý ĐÁP ÁN: đến trễ không báo (vi phạm tôn trọng + chữ tín) • áo thun (nhiễu ở khâu mã hóa phi ngôn ngữ) • nói 20 phút không hỏi (thiếu phản hồi, vi phạm nguyên tắc lắng nghe) • bắt máy 2 lần (vi phạm tôn trọng, tạo nhiễu).</a:t>
-            </a:r>
-          </a:p>
-          <a:p>
-            <a:r>
-              <a:t>• Câu khách nói "để anh xem lại rồi báo em sau" — hỏi lớp: đây là lời hẹn hay lời từ chối? (Nối tới Chương 3 – giao tiếp đa văn hóa).</a:t>
-            </a:r>
-          </a:p>
-          <a:p>
-            <a:r>
-              <a:t>• CHỐT: mọi lỗi đều quy về mô hình 5 khâu và 5 nguyên tắc vừa học.</a:t>
+              <a:t>GROUP WORK (15 minutes)</a:t>
+            </a:r>
+          </a:p>
+          <a:p>
+            <a:r>
+              <a:t>• Groups of 4–5, hand out A3 sheets or let them use their notebooks.</a:t>
+            </a:r>
+          </a:p>
+          <a:p>
+            <a:r>
+              <a:t>• Time it: 10 minutes of discussion, 5 minutes for two groups to present.</a:t>
+            </a:r>
+          </a:p>
+          <a:p>
+            <a:r>
+              <a:t>• SUGGESTED ANSWERS: arriving late without warning (breaks respect and keeping your word) • the T-shirt (noise at the non-verbal encoding stage) • talking for 20 minutes without a question (no feedback, breaks the listening principle) • taking two calls (breaks respect, creates noise).</a:t>
+            </a:r>
+          </a:p>
+          <a:p>
+            <a:r>
+              <a:t>• The customer's line "let me look at it and get back to you" — ask the class: is that an appointment or a refusal? (Links forward to Chapter 3, communicating across cultures.)</a:t>
+            </a:r>
+          </a:p>
+          <a:p>
+            <a:r>
+              <a:t>• LAND IT: every one of those mistakes maps back to the five stages and the five principles just taught.</a:t>
             </a:r>
           </a:p>
         </p:txBody>
@@ -1088,43 +1088,43 @@
           <a:lstStyle/>
           <a:p>
             <a:r>
-              <a:t>TỔNG KẾT (2 phút)</a:t>
-            </a:r>
-          </a:p>
-          <a:p>
-            <a:r>
-              <a:t>• Đọc chậm 3 điều, dừng 2 giây sau mỗi điều.</a:t>
-            </a:r>
-          </a:p>
-          <a:p>
-            <a:r>
-              <a:t>• Hỏi lớp: "Ai nhắc lại được 5 khâu của mô hình giao tiếp?" — gọi 1 sinh viên.</a:t>
-            </a:r>
-          </a:p>
-          <a:p>
-            <a:r>
-              <a:t>• Giao việc: làm 40 câu trắc nghiệm Chương 1 trước buổi sau.</a:t>
+              <a:t>SUMMARY (2 minutes)</a:t>
+            </a:r>
+          </a:p>
+          <a:p>
+            <a:r>
+              <a:t>• Read the three points slowly, pausing two seconds after each.</a:t>
+            </a:r>
+          </a:p>
+          <a:p>
+            <a:r>
+              <a:t>• Ask the class: "Who can name the five stages of the communication model?" — call on one student.</a:t>
+            </a:r>
+          </a:p>
+          <a:p>
+            <a:r>
+              <a:t>• Set the work: do the 40 multiple-choice questions for Chapter 1 before the next session.</a:t>
             </a:r>
           </a:p>
           <a:p/>
           <a:p>
             <a:r>
-              <a:t>NÓI ĐỦ Ý (phần đã rút khỏi slide)</a:t>
-            </a:r>
-          </a:p>
-          <a:p>
-            <a:r>
-              <a:t>• Giao tiếp kinh doanh không phải trò chuyện ngẫu nhiên: mỗi tương tác phục vụ mục tiêu, chịu chuẩn mực và ràng buộc lợi ích – pháp lý.</a:t>
-            </a:r>
-          </a:p>
-          <a:p>
-            <a:r>
-              <a:t>• Muốn sửa một cuộc giao tiếp thất bại, dò lại từng khâu: ý tưởng – mã hóa – kênh – giải mã – phản hồi.</a:t>
-            </a:r>
-          </a:p>
-          <a:p>
-            <a:r>
-              <a:t>• Trang phục, ánh mắt, giọng điệu, đúng giờ… "nói" trước và nói to hơn lời — hãy để chúng nói cùng một điều với bạn.</a:t>
+              <a:t>THE FULL VERSION (moved off the slide)</a:t>
+            </a:r>
+          </a:p>
+          <a:p>
+            <a:r>
+              <a:t>• Business communication is not idle conversation: every exchange serves an objective and carries norms and obligations, in interest and in law.</a:t>
+            </a:r>
+          </a:p>
+          <a:p>
+            <a:r>
+              <a:t>• To fix an exchange that failed, trace back each stage: idea – encoding – channel – decoding – feedback.</a:t>
+            </a:r>
+          </a:p>
+          <a:p>
+            <a:r>
+              <a:t>• Dress, eyes, tone, punctuality… "speak" first and speak louder than words — make them say the same thing you do.</a:t>
             </a:r>
           </a:p>
         </p:txBody>
@@ -1210,17 +1210,17 @@
           <a:lstStyle/>
           <a:p>
             <a:r>
-              <a:t>CÂU HỎI ÔN TẬP (1 phút)</a:t>
-            </a:r>
-          </a:p>
-          <a:p>
-            <a:r>
-              <a:t>• Không giải trên lớp — để sinh viên tự làm ở nhà.</a:t>
-            </a:r>
-          </a:p>
-          <a:p>
-            <a:r>
-              <a:t>• Nói rõ: 4 câu này nằm trong phạm vi kiểm tra giữa kỳ.</a:t>
+              <a:t>REVIEW QUESTIONS (1 minute)</a:t>
+            </a:r>
+          </a:p>
+          <a:p>
+            <a:r>
+              <a:t>• Don't work them in class — leave them for students to do at home.</a:t>
+            </a:r>
+          </a:p>
+          <a:p>
+            <a:r>
+              <a:t>• Say plainly: these four are within the scope of the mid-term test.</a:t>
             </a:r>
           </a:p>
         </p:txBody>
@@ -1306,22 +1306,22 @@
           <a:lstStyle/>
           <a:p>
             <a:r>
-              <a:t>TÀI LIỆU (1 phút)</a:t>
-            </a:r>
-          </a:p>
-          <a:p>
-            <a:r>
-              <a:t>• Chỉ rõ giáo trình chính đọc chương nào cho buổi sau.</a:t>
-            </a:r>
-          </a:p>
-          <a:p>
-            <a:r>
-              <a:t>• Nhắc: học liệu của cô sẽ gửi lên nhóm lớp sau mỗi buổi.</a:t>
-            </a:r>
-          </a:p>
-          <a:p>
-            <a:r>
-              <a:t>• Kết thúc buổi: cảm ơn lớp, nhắc lịch buổi sau.</a:t>
+              <a:t>READING (1 minute)</a:t>
+            </a:r>
+          </a:p>
+          <a:p>
+            <a:r>
+              <a:t>• Say exactly which chapter of the main textbook to read for next time.</a:t>
+            </a:r>
+          </a:p>
+          <a:p>
+            <a:r>
+              <a:t>• Remind them: your own materials go up on the class group after each session.</a:t>
+            </a:r>
+          </a:p>
+          <a:p>
+            <a:r>
+              <a:t>• Close the session: thank the class, remind them of the next date.</a:t>
             </a:r>
           </a:p>
         </p:txBody>
@@ -1407,27 +1407,27 @@
           <a:lstStyle/>
           <a:p>
             <a:r>
-              <a:t>CON SỐ MEHRABIAN (2 phút)</a:t>
-            </a:r>
-          </a:p>
-          <a:p>
-            <a:r>
-              <a:t>• Chiếu slide, để lớp nhìn 5 giây rồi mới nói.</a:t>
-            </a:r>
-          </a:p>
-          <a:p>
-            <a:r>
-              <a:t>• NÓI RÕ GIỚI HẠN: con số này chỉ đúng với thông điệp cảm xúc — đừng suy ra "nội dung chỉ chiếm 7%".</a:t>
-            </a:r>
-          </a:p>
-          <a:p>
-            <a:r>
-              <a:t>• Ý nghĩa thực hành: khi lời nói và cơ thể mâu thuẫn, người nghe TIN CƠ THỂ.</a:t>
-            </a:r>
-          </a:p>
-          <a:p>
-            <a:r>
-              <a:t>• Hỏi lớp: "Bạn nhận ra ai đó đang không vui dù họ nói 'em ổn' bằng cách nào?"''</a:t>
+              <a:t>THE MEHRABIAN NUMBERS (2 minutes)</a:t>
+            </a:r>
+          </a:p>
+          <a:p>
+            <a:r>
+              <a:t>• Put the slide up, let them look for five seconds before you speak.</a:t>
+            </a:r>
+          </a:p>
+          <a:p>
+            <a:r>
+              <a:t>• STATE THE LIMIT CLEARLY: these figures hold for emotional messages only — do not conclude "content is only 7%".</a:t>
+            </a:r>
+          </a:p>
+          <a:p>
+            <a:r>
+              <a:t>• What it means in practice: when the words and the body disagree, the listener BELIEVES THE BODY.</a:t>
+            </a:r>
+          </a:p>
+          <a:p>
+            <a:r>
+              <a:t>• Ask the class: "How do you know someone is upset even when they say 'I'm fine'?"''</a:t>
             </a:r>
           </a:p>
         </p:txBody>
@@ -1497,7 +1497,7 @@
           <a:lstStyle/>
           <a:p>
             <a:r>
-              <a:t>CHUYỂN MỤC (30 giây) — nói một câu dẫn rồi sang slide tiếp. Đây là mốc để lớp biết mình đang ở đâu trong bài.</a:t>
+              <a:t>SECTION BREAK (30 seconds) — one linking sentence, then move on. This is the marker that tells the class where they are in the lesson.</a:t>
             </a:r>
           </a:p>
         </p:txBody>
@@ -1567,53 +1567,53 @@
           <a:lstStyle/>
           <a:p>
             <a:r>
-              <a:t>YẾU TỐ ẢNH HƯỞNG (2 phút)</a:t>
-            </a:r>
-          </a:p>
-          <a:p>
-            <a:r>
-              <a:t>• Nhấn yếu tố ĐỊNH KIẾN — thứ khó thấy nhất nhưng phá hỏng nhiều cuộc giao tiếp nhất.</a:t>
-            </a:r>
-          </a:p>
-          <a:p>
-            <a:r>
-              <a:t>• Ví dụ: nghe giọng vùng miền rồi đánh giá năng lực; thấy người trẻ rồi cho là thiếu kinh nghiệm.</a:t>
-            </a:r>
-          </a:p>
-          <a:p>
-            <a:r>
-              <a:t>• Liên hệ Chương 3: phần giao tiếp đa văn hóa sẽ quay lại điểm này.</a:t>
+              <a:t>FACTORS THAT SHAPE IT (2 minutes)</a:t>
+            </a:r>
+          </a:p>
+          <a:p>
+            <a:r>
+              <a:t>• Press the PREJUDICE factor — the hardest to see and the one that wrecks the most exchanges.</a:t>
+            </a:r>
+          </a:p>
+          <a:p>
+            <a:r>
+              <a:t>• Examples: hearing a regional accent and judging competence; seeing someone young and assuming inexperience.</a:t>
+            </a:r>
+          </a:p>
+          <a:p>
+            <a:r>
+              <a:t>• Link to Chapter 3: the section on communicating across cultures comes back to this.</a:t>
             </a:r>
           </a:p>
           <a:p/>
           <a:p>
             <a:r>
-              <a:t>NÓI ĐỦ Ý (phần đã rút khỏi slide)</a:t>
-            </a:r>
-          </a:p>
-          <a:p>
-            <a:r>
-              <a:t>• Chủ thể: trạng thái tâm lý, cảm xúc, sức khỏe, vốn hiểu biết, kỹ năng, uy tín.</a:t>
-            </a:r>
-          </a:p>
-          <a:p>
-            <a:r>
-              <a:t>• Thông điệp: rõ hay mơ hồ, cấu trúc hợp lý hay lộn xộn, hợp người nghe hay không.</a:t>
-            </a:r>
-          </a:p>
-          <a:p>
-            <a:r>
-              <a:t>• Kênh và nhiễu: chọn kênh sai (việc hệ trọng lại nhắn tin), đường truyền kém, môi trường ồn ào.</a:t>
-            </a:r>
-          </a:p>
-          <a:p>
-            <a:r>
-              <a:t>• Bối cảnh văn hóa – xã hội: chuẩn mực, tôn giáo, vùng miền, thứ bậc — bình thường nơi này có thể thất lễ nơi khác.</a:t>
-            </a:r>
-          </a:p>
-          <a:p>
-            <a:r>
-              <a:t>• Quan hệ và định kiến: ấn tượng cũ, tin đồn, khoảng cách quyền lực làm méo cách diễn giải.</a:t>
+              <a:t>THE FULL VERSION (moved off the slide)</a:t>
+            </a:r>
+          </a:p>
+          <a:p>
+            <a:r>
+              <a:t>• The people: state of mind, mood, health, knowledge, skill, standing.</a:t>
+            </a:r>
+          </a:p>
+          <a:p>
+            <a:r>
+              <a:t>• The message: clear or vague, sensibly structured or scattered, pitched at the listener or not.</a:t>
+            </a:r>
+          </a:p>
+          <a:p>
+            <a:r>
+              <a:t>• Channel and noise: the wrong channel (something serious sent as a text), a bad line, a noisy room.</a:t>
+            </a:r>
+          </a:p>
+          <a:p>
+            <a:r>
+              <a:t>• Cultural and social setting: norms, religion, region, hierarchy — what is ordinary in one place can be an offence in another.</a:t>
+            </a:r>
+          </a:p>
+          <a:p>
+            <a:r>
+              <a:t>• Relationship and prejudice: an old impression, hearsay, distance of power — all bend the reading.</a:t>
             </a:r>
           </a:p>
         </p:txBody>
@@ -1683,48 +1683,48 @@
           <a:lstStyle/>
           <a:p>
             <a:r>
-              <a:t>CAM KẾT LỚP HỌC (2 phút)</a:t>
-            </a:r>
-          </a:p>
-          <a:p>
-            <a:r>
-              <a:t>• Nhấn mạnh: lớp này KHÔNG chỉ nghe giảng — mỗi buổi đều có tình huống và thực hành.</a:t>
-            </a:r>
-          </a:p>
-          <a:p>
-            <a:r>
-              <a:t>• Nói rõ 3 điều: điểm danh tối thiểu 80%; bài tập nộp đúng hạn; điện thoại để chế độ im lặng.</a:t>
-            </a:r>
-          </a:p>
-          <a:p>
-            <a:r>
-              <a:t>• Mời sinh viên nêu kỳ vọng của mình về học phần (2–3 bạn phát biểu).</a:t>
-            </a:r>
-          </a:p>
-          <a:p>
-            <a:r>
-              <a:t>CHUYỂN Ý: "Giờ ta bắt đầu từ mục tiêu của chương một."''</a:t>
+              <a:t>THE CLASS CONTRACT (2 minutes)</a:t>
+            </a:r>
+          </a:p>
+          <a:p>
+            <a:r>
+              <a:t>• Stress: this class is NOT just listening — every session has a case and hands-on work.</a:t>
+            </a:r>
+          </a:p>
+          <a:p>
+            <a:r>
+              <a:t>• Say three things plainly: at least 80% attendance; assignments on time; phones on silent.</a:t>
+            </a:r>
+          </a:p>
+          <a:p>
+            <a:r>
+              <a:t>• Invite students to say what they expect from the course (2–3 speak).</a:t>
+            </a:r>
+          </a:p>
+          <a:p>
+            <a:r>
+              <a:t>BRIDGE: "Now let's start with what this chapter is for."''</a:t>
             </a:r>
           </a:p>
           <a:p/>
           <a:p>
             <a:r>
-              <a:t>NÓI ĐỦ Ý (phần đã rút khỏi slide)</a:t>
-            </a:r>
-          </a:p>
-          <a:p>
-            <a:r>
-              <a:t>• Lý thuyết: 10 buổi sáng T7 &amp; CN, 05/12/2026 – 03/01/2027, phòng C0105 — Chương 1 Tổng quan giao tiếp; Chương 2 Kỹ năng chuyên nghiệp; Chương 3 Tình huống đặc thù; Chương 4 Đàm phán; Chương 5 Soạn thảo văn bản.</a:t>
-            </a:r>
-          </a:p>
-          <a:p>
-            <a:r>
-              <a:t>• Thực hành: chiều T7/CN, 26/12 – 24/01, phòng A0105 Mô phỏng Kinh tế — Bài 1 Thể thức; Bài 2 Văn bản hành chính; Bài 3 Văn bản thương mại.</a:t>
-            </a:r>
-          </a:p>
-          <a:p>
-            <a:r>
-              <a:t>• Đánh giá: chuyên cần (dự lớp ≥ 80%, bài tập đầy đủ); quá trình (trắc nghiệm + tự luận + thực hành); cuối kỳ thi thực hành.</a:t>
+              <a:t>THE FULL VERSION (moved off the slide)</a:t>
+            </a:r>
+          </a:p>
+          <a:p>
+            <a:r>
+              <a:t>• Theory: 10 Saturday and Sunday mornings, 05/12/2026 – 03/01/2027, room C0105 — Ch.1 Overview; Ch.2 Professional skills; Ch.3 Specific situations; Ch.4 Negotiation; Ch.5 Document drafting.</a:t>
+            </a:r>
+          </a:p>
+          <a:p>
+            <a:r>
+              <a:t>• Lab: Saturday/Sunday afternoons, 26/12 – 24/01, room A0105 Economics Simulation — Session 1 Format; Session 2 Administrative documents; Session 3 Commercial documents.</a:t>
+            </a:r>
+          </a:p>
+          <a:p>
+            <a:r>
+              <a:t>• Assessment: attendance (≥ 80% present, all assignments in); coursework (multiple choice + written + lab); a practical final examination.</a:t>
             </a:r>
           </a:p>
         </p:txBody>
@@ -1810,22 +1810,22 @@
           <a:lstStyle/>
           <a:p>
             <a:r>
-              <a:t>MỤC TIÊU CHƯƠNG (1 phút)</a:t>
-            </a:r>
-          </a:p>
-          <a:p>
-            <a:r>
-              <a:t>• Đọc lướt 4 mục tiêu, KHÔNG đọc từng chữ.</a:t>
-            </a:r>
-          </a:p>
-          <a:p>
-            <a:r>
-              <a:t>• Nhấn: mục tiêu số 4 (vận dụng nguyên tắc) sẽ được kiểm tra qua tình huống cuối chương.</a:t>
-            </a:r>
-          </a:p>
-          <a:p>
-            <a:r>
-              <a:t>• Dặn sinh viên chụp lại slide này để tự đối chiếu khi ôn thi.</a:t>
+              <a:t>CHAPTER OBJECTIVES (1 minute)</a:t>
+            </a:r>
+          </a:p>
+          <a:p>
+            <a:r>
+              <a:t>• Skim the four objectives, do NOT read them out word for word.</a:t>
+            </a:r>
+          </a:p>
+          <a:p>
+            <a:r>
+              <a:t>• Stress: objective 4 (applying the principles) is what the end-of-chapter case will test.</a:t>
+            </a:r>
+          </a:p>
+          <a:p>
+            <a:r>
+              <a:t>• Tell students to photograph this slide so they can check themselves against it when revising.</a:t>
             </a:r>
           </a:p>
         </p:txBody>
@@ -1911,17 +1911,17 @@
           <a:lstStyle/>
           <a:p>
             <a:r>
-              <a:t>LỘ TRÌNH CHƯƠNG (1 phút)</a:t>
-            </a:r>
-          </a:p>
-          <a:p>
-            <a:r>
-              <a:t>• Chỉ tay theo 5 mục, nói nhanh mỗi mục một câu.</a:t>
-            </a:r>
-          </a:p>
-          <a:p>
-            <a:r>
-              <a:t>• Nhấn: mục 1.2 (phương tiện) và 1.5 (nguyên tắc) là phần hay ra thi.</a:t>
+              <a:t>THE CHAPTER MAP (1 minute)</a:t>
+            </a:r>
+          </a:p>
+          <a:p>
+            <a:r>
+              <a:t>• Point down the five sections, one sentence each, quickly.</a:t>
+            </a:r>
+          </a:p>
+          <a:p>
+            <a:r>
+              <a:t>• Stress: 1.2 (means) and 1.5 (principles) are the parts that tend to come up in the exam.</a:t>
             </a:r>
           </a:p>
         </p:txBody>
@@ -2007,48 +2007,48 @@
           <a:lstStyle/>
           <a:p>
             <a:r>
-              <a:t>KHÁI NIỆM (3 phút)</a:t>
-            </a:r>
-          </a:p>
-          <a:p>
-            <a:r>
-              <a:t>• Viết lên bảng 2 từ: THÔNG TIN – MỤC ĐÍCH. Giao tiếp luôn có cả hai.</a:t>
-            </a:r>
-          </a:p>
-          <a:p>
-            <a:r>
-              <a:t>• Phân biệt: nói chuyện phiếm ≠ giao tiếp kinh doanh. Giao tiếp KD luôn gắn với MỤC TIÊU CÔNG VIỆC.</a:t>
-            </a:r>
-          </a:p>
-          <a:p>
-            <a:r>
-              <a:t>• Ví dụ nhanh: một cuộc gọi hỏi thăm khách hàng cũ — mục đích thật là gì? (giữ quan hệ để bán hàng lần sau).</a:t>
-            </a:r>
-          </a:p>
-          <a:p>
-            <a:r>
-              <a:t>HỎI LỚP: "Hôm nay các bạn đã có cuộc giao tiếp kinh doanh nào chưa?" (mua cà phê, hỏi bài giáo vụ...).</a:t>
+              <a:t>THE CONCEPT (3 minutes)</a:t>
+            </a:r>
+          </a:p>
+          <a:p>
+            <a:r>
+              <a:t>• Write two words on the board: INFORMATION – PURPOSE. Communication always has both.</a:t>
+            </a:r>
+          </a:p>
+          <a:p>
+            <a:r>
+              <a:t>• Draw the line: small talk ≠ business communication. Business communication is always tied to a WORK OBJECTIVE.</a:t>
+            </a:r>
+          </a:p>
+          <a:p>
+            <a:r>
+              <a:t>• Quick example: a call to an old customer just to say hello — what is the real purpose? (Keeping the relationship warm for the next sale.)</a:t>
+            </a:r>
+          </a:p>
+          <a:p>
+            <a:r>
+              <a:t>ASK THE CLASS: "Have you had a business conversation today?" (Buying coffee, asking the office about a form…)</a:t>
             </a:r>
           </a:p>
           <a:p/>
           <a:p>
             <a:r>
-              <a:t>NÓI ĐỦ Ý (phần đã rút khỏi slide)</a:t>
-            </a:r>
-          </a:p>
-          <a:p>
-            <a:r>
-              <a:t>• Giao tiếp: quá trình trao đổi thông tin, tư tưởng, tình cảm giữa người với người nhằm đạt một mục đích — bằng cả lời nói, chữ viết và hành vi không lời.</a:t>
-            </a:r>
-          </a:p>
-          <a:p>
-            <a:r>
-              <a:t>• Giao tiếp kinh doanh: gắn với quá trình kinh doanh — doanh nghiệp với khách hàng, đối tác, cơ quan quản lý, và giữa các thành viên trong tổ chức — hướng tới mục tiêu kinh doanh cụ thể.</a:t>
-            </a:r>
-          </a:p>
-          <a:p>
-            <a:r>
-              <a:t>• Vì sao học: khảo sát nhà tuyển dụng nhiều năm liền xếp kỹ năng giao tiếp vào nhóm được yêu cầu cao nhất — bán được ý tưởng trước khi bán được sản phẩm.</a:t>
+              <a:t>THE FULL VERSION (moved off the slide)</a:t>
+            </a:r>
+          </a:p>
+          <a:p>
+            <a:r>
+              <a:t>• Communication: the process of exchanging information, ideas and feelings between people to reach a purpose — through speech, writing and wordless behaviour alike.</a:t>
+            </a:r>
+          </a:p>
+          <a:p>
+            <a:r>
+              <a:t>• Business communication: tied to the running of a business — the firm with its customers, partners, regulators, and among its own people — aimed at a specific business objective.</a:t>
+            </a:r>
+          </a:p>
+          <a:p>
+            <a:r>
+              <a:t>• Why study it: employer surveys have for years put communication among the most demanded skills — you sell the idea before you sell the product.</a:t>
             </a:r>
           </a:p>
         </p:txBody>
@@ -2134,53 +2134,53 @@
           <a:lstStyle/>
           <a:p>
             <a:r>
-              <a:t>BỐN ĐẶC ĐIỂM (3 phút)</a:t>
-            </a:r>
-          </a:p>
-          <a:p>
-            <a:r>
-              <a:t>• Đặc điểm 3 (RÀNG BUỘC PHÁP LÝ) là quan trọng nhất — nhấn mạnh mạnh.</a:t>
-            </a:r>
-          </a:p>
-          <a:p>
-            <a:r>
-              <a:t>• Ví dụ có thật: nhân viên hứa miệng giảm giá 20% với khách → công ty vẫn phải thực hiện vì đó là lời của người đại diện.</a:t>
-            </a:r>
-          </a:p>
-          <a:p>
-            <a:r>
-              <a:t>• Nối sang học phần: đó là lý do Chương 5 dạy các bạn VĂN BẢN HÓA mọi thỏa thuận.</a:t>
-            </a:r>
-          </a:p>
-          <a:p>
-            <a:r>
-              <a:t>CHUYỂN Ý: "Vậy một cuộc giao tiếp diễn ra qua những khâu nào?"''</a:t>
+              <a:t>FOUR DEFINING FEATURES (3 minutes)</a:t>
+            </a:r>
+          </a:p>
+          <a:p>
+            <a:r>
+              <a:t>• Feature 3 (LEGALLY BINDING) is the most important — press hard on it.</a:t>
+            </a:r>
+          </a:p>
+          <a:p>
+            <a:r>
+              <a:t>• A real example: a salesperson verbally promises a 20% discount to a customer → the company still has to honour it, because that was its representative speaking.</a:t>
+            </a:r>
+          </a:p>
+          <a:p>
+            <a:r>
+              <a:t>• Tie it to the course: this is exactly why Chapter 5 teaches you to PUT EVERY AGREEMENT IN WRITING.</a:t>
+            </a:r>
+          </a:p>
+          <a:p>
+            <a:r>
+              <a:t>BRIDGE: "So what stages does an exchange actually pass through?"''</a:t>
             </a:r>
           </a:p>
           <a:p/>
           <a:p>
             <a:r>
-              <a:t>NÓI ĐỦ Ý (phần đã rút khỏi slide)</a:t>
-            </a:r>
-          </a:p>
-          <a:p>
-            <a:r>
-              <a:t>• Có mục đích: mỗi cuộc gặp, cuộc gọi, email đều phục vụ một mục tiêu công việc — bán hàng, hợp tác, giải quyết vấn đề.</a:t>
-            </a:r>
-          </a:p>
-          <a:p>
-            <a:r>
-              <a:t>• Đa dạng chủ thể: cùng lúc giao tiếp với khách hàng, cấp trên, đồng nghiệp, cơ quan nhà nước — mỗi đối tượng một chuẩn mực riêng.</a:t>
-            </a:r>
-          </a:p>
-          <a:p>
-            <a:r>
-              <a:t>• Ràng buộc: lời nói và văn bản trong kinh doanh có thể tạo ra nghĩa vụ, hợp đồng, trách nhiệm.</a:t>
-            </a:r>
-          </a:p>
-          <a:p>
-            <a:r>
-              <a:t>• Khoa học và nghệ thuật: có nguyên tắc, quy trình để học; vận dụng linh hoạt theo con người và hoàn cảnh mới hiệu quả.</a:t>
+              <a:t>THE FULL VERSION (moved off the slide)</a:t>
+            </a:r>
+          </a:p>
+          <a:p>
+            <a:r>
+              <a:t>• Purposeful: every meeting, call and email serves a work objective — a sale, a partnership, a problem solved.</a:t>
+            </a:r>
+          </a:p>
+          <a:p>
+            <a:r>
+              <a:t>• Many kinds of counterpart: customers, superiors, colleagues and government bodies all at once — each with its own norms.</a:t>
+            </a:r>
+          </a:p>
+          <a:p>
+            <a:r>
+              <a:t>• Binding: words and documents in business can create obligations, contracts, liability.</a:t>
+            </a:r>
+          </a:p>
+          <a:p>
+            <a:r>
+              <a:t>• Science and art: there are rules and procedures to learn; applying them flexibly to the person and the moment is what makes them work.</a:t>
             </a:r>
           </a:p>
         </p:txBody>
@@ -2266,68 +2266,68 @@
           <a:lstStyle/>
           <a:p>
             <a:r>
-              <a:t>SƠ ĐỒ TRUNG TÂM CỦA CHƯƠNG (4 phút)</a:t>
-            </a:r>
-          </a:p>
-          <a:p>
-            <a:r>
-              <a:t>• Vẽ lại sơ đồ lên bảng trong lúc giảng — sinh viên nhớ tốt hơn khi thấy nó được vẽ ra.</a:t>
-            </a:r>
-          </a:p>
-          <a:p>
-            <a:r>
-              <a:t>• Đi từng khâu: NGƯỜI GỬI → MÃ HÓA → THÔNG ĐIỆP/KÊNH → GIẢI MÃ → PHẢN HỒI.</a:t>
-            </a:r>
-          </a:p>
-          <a:p>
-            <a:r>
-              <a:t>• Điểm nhấn: NHIỄU có ở MỌI khâu, không chỉ ở đường truyền.</a:t>
-            </a:r>
-          </a:p>
-          <a:p>
-            <a:r>
-              <a:t>• Bài tập miệng: "Sếp gửi email giao việc, nhân viên làm sai. Hỏng ở khâu nào?" — cho lớp đoán, rồi phân tích: có thể mã hóa kém (email mơ hồ), có thể giải mã sai (nhân viên hiểu nhầm), có thể thiếu phản hồi (không hỏi lại).</a:t>
-            </a:r>
-          </a:p>
-          <a:p>
-            <a:r>
-              <a:t>• CHỐT: cuộc giao tiếp thất bại thì đừng đổ lỗi, hãy DÒ LẠI TỪNG KHÂU.</a:t>
+              <a:t>THE CENTRAL DIAGRAM OF THE CHAPTER (4 minutes)</a:t>
+            </a:r>
+          </a:p>
+          <a:p>
+            <a:r>
+              <a:t>• Redraw the diagram on the board while you talk — students remember it better when they watch it being drawn.</a:t>
+            </a:r>
+          </a:p>
+          <a:p>
+            <a:r>
+              <a:t>• Walk each stage: SENDER → ENCODING → MESSAGE/CHANNEL → DECODING → FEEDBACK.</a:t>
+            </a:r>
+          </a:p>
+          <a:p>
+            <a:r>
+              <a:t>• The key point: NOISE sits at EVERY stage, not just on the wire.</a:t>
+            </a:r>
+          </a:p>
+          <a:p>
+            <a:r>
+              <a:t>• Oral exercise: "A manager emails a task, the employee does it wrong. Which stage broke?" — let the class guess, then unpack it: the encoding may have been poor (a vague email), the decoding may have failed (the employee misread it), or feedback may be missing (they never asked back).</a:t>
+            </a:r>
+          </a:p>
+          <a:p>
+            <a:r>
+              <a:t>• LAND IT: when an exchange fails, don't apportion blame — TRACE IT BACK STAGE BY STAGE.</a:t>
             </a:r>
           </a:p>
           <a:p/>
           <a:p>
             <a:r>
-              <a:t>NÓI ĐỦ Ý (phần đã rút khỏi slide)</a:t>
-            </a:r>
-          </a:p>
-          <a:p>
-            <a:r>
-              <a:t>• Người gửi: hình thành ý tưởng, xác định mục đích truyền đạt.</a:t>
-            </a:r>
-          </a:p>
-          <a:p>
-            <a:r>
-              <a:t>• Mã hóa: chuyển ý tưởng thành lời nói, chữ viết, cử chỉ.</a:t>
-            </a:r>
-          </a:p>
-          <a:p>
-            <a:r>
-              <a:t>• Thông điệp: nội dung truyền qua kênh — trực tiếp, điện thoại, email…</a:t>
-            </a:r>
-          </a:p>
-          <a:p>
-            <a:r>
-              <a:t>• Giải mã: người nhận tiếp nhận và diễn giải.</a:t>
-            </a:r>
-          </a:p>
-          <a:p>
-            <a:r>
-              <a:t>• Phản hồi: người nhận đáp lại — căn cứ để biết giao tiếp có hiệu quả.</a:t>
-            </a:r>
-          </a:p>
-          <a:p>
-            <a:r>
-              <a:t>• NHIỄU: tiếng ồn, đường truyền kém, khác biệt ngôn ngữ – văn hóa, định kiến, cảm xúc tiêu cực… xuất hiện ở mọi khâu. Người giao tiếp giỏi chủ động giảm nhiễu ở từng bước.</a:t>
+              <a:t>THE FULL VERSION (moved off the slide)</a:t>
+            </a:r>
+          </a:p>
+          <a:p>
+            <a:r>
+              <a:t>• Sender: forms the idea, settles what it is for.</a:t>
+            </a:r>
+          </a:p>
+          <a:p>
+            <a:r>
+              <a:t>• Encoding: turning the idea into speech, writing, gesture.</a:t>
+            </a:r>
+          </a:p>
+          <a:p>
+            <a:r>
+              <a:t>• Message: the content carried by a channel — in person, telephone, email…</a:t>
+            </a:r>
+          </a:p>
+          <a:p>
+            <a:r>
+              <a:t>• Decoding: the receiver takes it in and interprets it.</a:t>
+            </a:r>
+          </a:p>
+          <a:p>
+            <a:r>
+              <a:t>• Feedback: the receiver answers — the only evidence that it worked.</a:t>
+            </a:r>
+          </a:p>
+          <a:p>
+            <a:r>
+              <a:t>• NOISE: background noise, a bad line, differences of language and culture, prejudice, bad mood… present at every stage. A good communicator cuts the noise at each step deliberately.</a:t>
             </a:r>
           </a:p>
         </p:txBody>
@@ -2413,43 +2413,43 @@
           <a:lstStyle/>
           <a:p>
             <a:r>
-              <a:t>NGÔN NGỮ NÓI VÀ VIẾT (2 phút)</a:t>
-            </a:r>
-          </a:p>
-          <a:p>
-            <a:r>
-              <a:t>• So sánh nhanh: nói thì NHANH và giàu cảm xúc nhưng "lời nói gió bay"; viết thì CHẬM hơn nhưng LƯU LẠI LÀM BẰNG CHỨNG.</a:t>
-            </a:r>
-          </a:p>
-          <a:p>
-            <a:r>
-              <a:t>• Nguyên tắc thực hành: việc quan trọng — thỏa thuận xong bằng lời phải XÁC NHẬN LẠI BẰNG EMAIL.</a:t>
-            </a:r>
-          </a:p>
-          <a:p>
-            <a:r>
-              <a:t>• Liên hệ nghề nghiệp: đây chính là kỹ năng nửa sau học phần.</a:t>
+              <a:t>SPOKEN AND WRITTEN (2 minutes)</a:t>
+            </a:r>
+          </a:p>
+          <a:p>
+            <a:r>
+              <a:t>• Quick comparison: speech is FAST and expressive but "spoken words blow away"; writing is SLOWER but STAYS ON THE RECORD AS EVIDENCE.</a:t>
+            </a:r>
+          </a:p>
+          <a:p>
+            <a:r>
+              <a:t>• The working rule: on anything important, an agreement reached in speech must be CONFIRMED BY EMAIL.</a:t>
+            </a:r>
+          </a:p>
+          <a:p>
+            <a:r>
+              <a:t>• Career link: this is precisely the skill of the second half of the course.</a:t>
             </a:r>
           </a:p>
           <a:p/>
           <a:p>
             <a:r>
-              <a:t>NÓI ĐỦ Ý (phần đã rút khỏi slide)</a:t>
-            </a:r>
-          </a:p>
-          <a:p>
-            <a:r>
-              <a:t>• Nói: trực tiếp, nhanh, giàu cảm xúc, phản hồi tức thì — nhưng "lời nói gió bay", dễ sai khi thiếu chuẩn bị. Chú ý phát âm, tốc độ, âm lượng, ngữ điệu.</a:t>
-            </a:r>
-          </a:p>
-          <a:p>
-            <a:r>
-              <a:t>• Viết: chính xác, cân nhắc được, lưu lại làm bằng chứng — nền tảng của Chương 5. Chú ý chính tả, thể thức, văn phong.</a:t>
-            </a:r>
-          </a:p>
-          <a:p>
-            <a:r>
-              <a:t>• Dùng từ: rõ ràng, lịch sự, tích cực; tránh khẩu ngữ, tiếng lóng, từ đa nghĩa; ưu tiên câu chủ động, ngắn gọn.</a:t>
+              <a:t>THE FULL VERSION (moved off the slide)</a:t>
+            </a:r>
+          </a:p>
+          <a:p>
+            <a:r>
+              <a:t>• Speech: direct, fast, expressive, feedback at once — but "spoken words blow away", and it goes wrong easily without preparation. Mind your pronunciation, pace, volume, intonation.</a:t>
+            </a:r>
+          </a:p>
+          <a:p>
+            <a:r>
+              <a:t>• Writing: precise, considered, kept as evidence — the ground for Chapter 5. Mind your spelling, format, register.</a:t>
+            </a:r>
+          </a:p>
+          <a:p>
+            <a:r>
+              <a:t>• Word choice: clear, courteous, positive; avoid colloquialisms, slang and ambiguous words; prefer active, short sentences.</a:t>
             </a:r>
           </a:p>
         </p:txBody>
@@ -2535,58 +2535,58 @@
           <a:lstStyle/>
           <a:p>
             <a:r>
-              <a:t>PHI NGÔN NGỮ (4 phút) — PHẦN SINH VIÊN THÍCH NHẤT</a:t>
-            </a:r>
-          </a:p>
-          <a:p>
-            <a:r>
-              <a:t>• Làm thử ngay tại lớp: nói câu "Rất vui được gặp bạn" hai lần — lần đầu nhìn xuống đất giọng đều, lần sau nhìn mắt và mỉm cười. Hỏi lớp tin lần nào.</a:t>
-            </a:r>
-          </a:p>
-          <a:p>
-            <a:r>
-              <a:t>• Giới thiệu con số Mehrabian 7 – 38 – 55%, nhưng NÓI RÕ: chỉ đúng với thông điệp CẢM XÚC, không phải mọi tình huống.</a:t>
-            </a:r>
-          </a:p>
-          <a:p>
-            <a:r>
-              <a:t>• Khoảng cách giao tiếp: mời 2 sinh viên lên đứng thử ở 3 khoảng cách khác nhau cho lớp quan sát.</a:t>
-            </a:r>
-          </a:p>
-          <a:p>
-            <a:r>
-              <a:t>• CHỐT: đừng để cơ thể nói ngược lại lời của mình.</a:t>
+              <a:t>NON-VERBAL (4 minutes) — THE PART STUDENTS LIKE MOST</a:t>
+            </a:r>
+          </a:p>
+          <a:p>
+            <a:r>
+              <a:t>• Demonstrate it live: say "Very pleased to meet you" twice — first looking at the floor in a flat voice, then meeting their eyes with a smile. Ask which one they believe.</a:t>
+            </a:r>
+          </a:p>
+          <a:p>
+            <a:r>
+              <a:t>• Introduce Mehrabian's 7 – 38 – 55%, but SAY THE LIMIT OUT LOUD: it holds for EMOTIONAL messages only, not for every situation.</a:t>
+            </a:r>
+          </a:p>
+          <a:p>
+            <a:r>
+              <a:t>• Distance: bring two students to the front and have them stand at three different distances for the class to watch.</a:t>
+            </a:r>
+          </a:p>
+          <a:p>
+            <a:r>
+              <a:t>• LAND IT: never let your body say the opposite of your words.</a:t>
             </a:r>
           </a:p>
           <a:p/>
           <a:p>
             <a:r>
-              <a:t>NÓI ĐỦ Ý (phần đã rút khỏi slide)</a:t>
-            </a:r>
-          </a:p>
-          <a:p>
-            <a:r>
-              <a:t>• Ánh mắt – nét mặt – nụ cười: kênh biểu cảm mạnh nhất; nhìn vào mắt thể hiện tự tin và tôn trọng.</a:t>
-            </a:r>
-          </a:p>
-          <a:p>
-            <a:r>
-              <a:t>• Cử chỉ – tư thế – dáng đi: thẳng, cởi mở tạo thiện cảm; khoanh tay, nhìn đồng hồ phát tín hiệu khép kín, sốt ruột.</a:t>
-            </a:r>
-          </a:p>
-          <a:p>
-            <a:r>
-              <a:t>• Khoảng cách: thân mật (&lt;0,5 m) – cá nhân – xã giao (1,2–3,5 m) – công cộng; chọn sai gây khó chịu.</a:t>
-            </a:r>
-          </a:p>
-          <a:p>
-            <a:r>
-              <a:t>• Trang phục – giọng điệu – thời gian: ăn mặc phù hợp bối cảnh; giọng điệu quyết định cách thông điệp được đón nhận; đúng giờ cũng là thông điệp.</a:t>
-            </a:r>
-          </a:p>
-          <a:p>
-            <a:r>
-              <a:t>• Ba con số trên slide là của Mehrabian, cho THÔNG ĐIỆP CẢM XÚC — đừng khái quát thành mọi loại giao tiếp. Chốt: đừng để cơ thể "nói" ngược với lời.</a:t>
+              <a:t>THE FULL VERSION (moved off the slide)</a:t>
+            </a:r>
+          </a:p>
+          <a:p>
+            <a:r>
+              <a:t>• Eyes, face, smile: the strongest expressive channel; meeting someone's eyes reads as confidence and respect.</a:t>
+            </a:r>
+          </a:p>
+          <a:p>
+            <a:r>
+              <a:t>• Gesture, posture, walk: upright and open earns goodwill; folded arms or a glance at your watch signal closed-off and impatient.</a:t>
+            </a:r>
+          </a:p>
+          <a:p>
+            <a:r>
+              <a:t>• Distance: intimate (&lt;0.5 m) – personal – social (1.2–3.5 m) – public; the wrong one makes people uncomfortable.</a:t>
+            </a:r>
+          </a:p>
+          <a:p>
+            <a:r>
+              <a:t>• Dress, tone, time: dress for the setting; tone decides how the message lands; being on time is itself a message.</a:t>
+            </a:r>
+          </a:p>
+          <a:p>
+            <a:r>
+              <a:t>• The three numbers on the slide are Mehrabian's, for EMOTIONAL MESSAGES — don't generalise them to all communication. Land it: never let your body "say" the opposite of your words.</a:t>
             </a:r>
           </a:p>
         </p:txBody>

--- a/slides-en/01-overview-of-communication.pptx
+++ b/slides-en/01-overview-of-communication.pptx
@@ -752,10 +752,54 @@
           <a:lstStyle/>
           <a:p>
             <a:r>
-              <a:rPr lang="en-US" dirty="0"/>
-              <a:t/>
-            </a:r>
-            <a:endParaRPr lang="en-US" dirty="0"/>
+              <a:t>FACTORS THAT SHAPE IT (2 minutes)</a:t>
+            </a:r>
+          </a:p>
+          <a:p>
+            <a:r>
+              <a:t>• Press the PREJUDICE factor — the hardest to see and the one that wrecks the most exchanges.</a:t>
+            </a:r>
+          </a:p>
+          <a:p>
+            <a:r>
+              <a:t>• Examples: hearing a regional accent and judging competence; seeing someone young and assuming inexperience.</a:t>
+            </a:r>
+          </a:p>
+          <a:p>
+            <a:r>
+              <a:t>• Link to Chapter 3: the section on communicating across cultures comes back to this.</a:t>
+            </a:r>
+          </a:p>
+          <a:p/>
+          <a:p>
+            <a:r>
+              <a:t>THE FULL VERSION (moved off the slide)</a:t>
+            </a:r>
+          </a:p>
+          <a:p>
+            <a:r>
+              <a:t>• The people: state of mind, mood, health, knowledge, skill, standing.</a:t>
+            </a:r>
+          </a:p>
+          <a:p>
+            <a:r>
+              <a:t>• The message: clear or vague, sensibly structured or scattered, pitched at the listener or not.</a:t>
+            </a:r>
+          </a:p>
+          <a:p>
+            <a:r>
+              <a:t>• Channel and noise: the wrong channel (something serious sent as a text), a bad line, a noisy room.</a:t>
+            </a:r>
+          </a:p>
+          <a:p>
+            <a:r>
+              <a:t>• Cultural and social setting: norms, religion, region, hierarchy — what is ordinary in one place can be an offence in another.</a:t>
+            </a:r>
+          </a:p>
+          <a:p>
+            <a:r>
+              <a:t>• Relationship and prejudice: an old impression, hearsay, distance of power — all bend the reading.</a:t>
+            </a:r>
           </a:p>
         </p:txBody>
       </p:sp>
@@ -1567,53 +1611,7 @@
           <a:lstStyle/>
           <a:p>
             <a:r>
-              <a:t>FACTORS THAT SHAPE IT (2 minutes)</a:t>
-            </a:r>
-          </a:p>
-          <a:p>
-            <a:r>
-              <a:t>• Press the PREJUDICE factor — the hardest to see and the one that wrecks the most exchanges.</a:t>
-            </a:r>
-          </a:p>
-          <a:p>
-            <a:r>
-              <a:t>• Examples: hearing a regional accent and judging competence; seeing someone young and assuming inexperience.</a:t>
-            </a:r>
-          </a:p>
-          <a:p>
-            <a:r>
-              <a:t>• Link to Chapter 3: the section on communicating across cultures comes back to this.</a:t>
-            </a:r>
-          </a:p>
-          <a:p/>
-          <a:p>
-            <a:r>
-              <a:t>THE FULL VERSION (moved off the slide)</a:t>
-            </a:r>
-          </a:p>
-          <a:p>
-            <a:r>
-              <a:t>• The people: state of mind, mood, health, knowledge, skill, standing.</a:t>
-            </a:r>
-          </a:p>
-          <a:p>
-            <a:r>
-              <a:t>• The message: clear or vague, sensibly structured or scattered, pitched at the listener or not.</a:t>
-            </a:r>
-          </a:p>
-          <a:p>
-            <a:r>
-              <a:t>• Channel and noise: the wrong channel (something serious sent as a text), a bad line, a noisy room.</a:t>
-            </a:r>
-          </a:p>
-          <a:p>
-            <a:r>
-              <a:t>• Cultural and social setting: norms, religion, region, hierarchy — what is ordinary in one place can be an offence in another.</a:t>
-            </a:r>
-          </a:p>
-          <a:p>
-            <a:r>
-              <a:t>• Relationship and prejudice: an old impression, hearsay, distance of power — all bend the reading.</a:t>
+              <a:t>SECTION CHANGE (30 seconds) — remind them the rest of the chapter is the part that comes up in the exam.</a:t>
             </a:r>
           </a:p>
         </p:txBody>
